--- a/DR/Защита_Тема_11.pptx
+++ b/DR/Защита_Тема_11.pptx
@@ -118,6 +118,11 @@
       </a:defRPr>
     </a:lvl9pPr>
   </p:defaultTextStyle>
+  <p:extLst>
+    <p:ext uri="{EFAFB233-063F-42B5-8137-9DF3F51BA10A}">
+      <p15:sldGuideLst xmlns:p15="http://schemas.microsoft.com/office/powerpoint/2012/main"/>
+    </p:ext>
+  </p:extLst>
 </p:presentation>
 </file>
 
@@ -1172,10 +1177,24 @@
         </dgm:presLayoutVars>
       </dgm:prSet>
       <dgm:spPr/>
+      <dgm:t>
+        <a:bodyPr/>
+        <a:lstStyle/>
+        <a:p>
+          <a:endParaRPr lang="en-US"/>
+        </a:p>
+      </dgm:t>
     </dgm:pt>
     <dgm:pt modelId="{2564EEDD-4B60-4B30-9DF0-AD5110A78A6F}" type="pres">
       <dgm:prSet presAssocID="{CD8A3CA9-5CED-4745-BCA3-5A1833F591B2}" presName="centerShape" presStyleLbl="node0" presStyleIdx="0" presStyleCnt="1" custLinFactNeighborX="-179" custLinFactNeighborY="-1048"/>
       <dgm:spPr/>
+      <dgm:t>
+        <a:bodyPr/>
+        <a:lstStyle/>
+        <a:p>
+          <a:endParaRPr lang="en-US"/>
+        </a:p>
+      </dgm:t>
     </dgm:pt>
     <dgm:pt modelId="{C842AD80-31E6-4C2F-A1BC-DC79527F283F}" type="pres">
       <dgm:prSet presAssocID="{41C454EF-55A2-4338-8CC2-E287D99E4001}" presName="node" presStyleLbl="node1" presStyleIdx="0" presStyleCnt="5">
@@ -1199,6 +1218,13 @@
     <dgm:pt modelId="{9D3FB59C-75B5-4B01-B41D-A0F7521C98AF}" type="pres">
       <dgm:prSet presAssocID="{1A2F81F5-FA29-47A8-AAED-C2CA7ACB529F}" presName="sibTrans" presStyleLbl="sibTrans2D1" presStyleIdx="0" presStyleCnt="5"/>
       <dgm:spPr/>
+      <dgm:t>
+        <a:bodyPr/>
+        <a:lstStyle/>
+        <a:p>
+          <a:endParaRPr lang="en-US"/>
+        </a:p>
+      </dgm:t>
     </dgm:pt>
     <dgm:pt modelId="{0DFD0002-DAF2-4F4B-B7BB-A0EFF40EE5B3}" type="pres">
       <dgm:prSet presAssocID="{16E5719D-5D8F-4704-8E21-62A44ADBBF8C}" presName="node" presStyleLbl="node1" presStyleIdx="1" presStyleCnt="5">
@@ -1222,6 +1248,13 @@
     <dgm:pt modelId="{94E5EAA6-8B40-4A59-968B-1AB72FFBE2E7}" type="pres">
       <dgm:prSet presAssocID="{17D2A4CC-7C76-456C-8056-6F0749700241}" presName="sibTrans" presStyleLbl="sibTrans2D1" presStyleIdx="1" presStyleCnt="5"/>
       <dgm:spPr/>
+      <dgm:t>
+        <a:bodyPr/>
+        <a:lstStyle/>
+        <a:p>
+          <a:endParaRPr lang="en-US"/>
+        </a:p>
+      </dgm:t>
     </dgm:pt>
     <dgm:pt modelId="{0E58E545-4E35-4BC6-AD43-F5B0B7A57905}" type="pres">
       <dgm:prSet presAssocID="{1D72B2E1-7A1B-4A5C-B61D-AF8D42CE0702}" presName="node" presStyleLbl="node1" presStyleIdx="2" presStyleCnt="5" custRadScaleRad="99049" custRadScaleInc="3186">
@@ -1245,6 +1278,13 @@
     <dgm:pt modelId="{37EB6DA0-DAE6-4ECC-AEB7-B1BC74DBD0FA}" type="pres">
       <dgm:prSet presAssocID="{B5DB10E3-DC77-4F9E-AC9B-25D9199720F2}" presName="sibTrans" presStyleLbl="sibTrans2D1" presStyleIdx="2" presStyleCnt="5"/>
       <dgm:spPr/>
+      <dgm:t>
+        <a:bodyPr/>
+        <a:lstStyle/>
+        <a:p>
+          <a:endParaRPr lang="en-US"/>
+        </a:p>
+      </dgm:t>
     </dgm:pt>
     <dgm:pt modelId="{93CD3BE8-8AFA-4B5F-84A4-7F96869B63BB}" type="pres">
       <dgm:prSet presAssocID="{FA3F4066-15F9-4F6C-9779-E90DF796C944}" presName="node" presStyleLbl="node1" presStyleIdx="3" presStyleCnt="5">
@@ -1268,6 +1308,13 @@
     <dgm:pt modelId="{98834107-406C-4EA0-BAA6-58D9FCAA84C7}" type="pres">
       <dgm:prSet presAssocID="{DCD9FE80-A01F-4577-86D0-CD68EF6EF46B}" presName="sibTrans" presStyleLbl="sibTrans2D1" presStyleIdx="3" presStyleCnt="5"/>
       <dgm:spPr/>
+      <dgm:t>
+        <a:bodyPr/>
+        <a:lstStyle/>
+        <a:p>
+          <a:endParaRPr lang="en-US"/>
+        </a:p>
+      </dgm:t>
     </dgm:pt>
     <dgm:pt modelId="{7715F279-7181-4A77-A3EF-35B9E0D03FD7}" type="pres">
       <dgm:prSet presAssocID="{0633DC02-4E3D-4445-8D7A-37AA5E815FDA}" presName="node" presStyleLbl="node1" presStyleIdx="4" presStyleCnt="5">
@@ -1291,6 +1338,13 @@
     <dgm:pt modelId="{BC224293-7198-4684-ABCD-06CE890D5ABA}" type="pres">
       <dgm:prSet presAssocID="{47BE1A68-4D31-4218-B4C9-710716C52730}" presName="sibTrans" presStyleLbl="sibTrans2D1" presStyleIdx="4" presStyleCnt="5"/>
       <dgm:spPr/>
+      <dgm:t>
+        <a:bodyPr/>
+        <a:lstStyle/>
+        <a:p>
+          <a:endParaRPr lang="en-US"/>
+        </a:p>
+      </dgm:t>
     </dgm:pt>
   </dgm:ptLst>
   <dgm:cxnLst>
@@ -1302,12 +1356,12 @@
     <dgm:cxn modelId="{9E3B09FE-FA47-4FA2-B2D2-74A56B9604E0}" srcId="{CD8A3CA9-5CED-4745-BCA3-5A1833F591B2}" destId="{1D72B2E1-7A1B-4A5C-B61D-AF8D42CE0702}" srcOrd="2" destOrd="0" parTransId="{FC043EEF-706E-4FC7-B217-DBC9AA2B9390}" sibTransId="{B5DB10E3-DC77-4F9E-AC9B-25D9199720F2}"/>
     <dgm:cxn modelId="{1413FF3C-FC95-4037-B250-1737438E0126}" type="presOf" srcId="{EAE84B20-3AC8-42A9-94EB-B9F893C83514}" destId="{6636E035-B3E3-4664-BF28-4CFF1595A00B}" srcOrd="0" destOrd="0" presId="urn:microsoft.com/office/officeart/2005/8/layout/radial6"/>
     <dgm:cxn modelId="{D686A297-5082-449A-93B5-9051F609A67F}" type="presOf" srcId="{CD8A3CA9-5CED-4745-BCA3-5A1833F591B2}" destId="{2564EEDD-4B60-4B30-9DF0-AD5110A78A6F}" srcOrd="0" destOrd="0" presId="urn:microsoft.com/office/officeart/2005/8/layout/radial6"/>
+    <dgm:cxn modelId="{12D644E1-5503-4435-8939-E72C51A17B47}" srcId="{CD8A3CA9-5CED-4745-BCA3-5A1833F591B2}" destId="{41C454EF-55A2-4338-8CC2-E287D99E4001}" srcOrd="0" destOrd="0" parTransId="{F5CCBDC0-0696-4383-B8D0-15718AB2EBCA}" sibTransId="{1A2F81F5-FA29-47A8-AAED-C2CA7ACB529F}"/>
     <dgm:cxn modelId="{CD8E9138-82E5-467E-A51D-2DBEAC9BC347}" type="presOf" srcId="{DCD9FE80-A01F-4577-86D0-CD68EF6EF46B}" destId="{98834107-406C-4EA0-BAA6-58D9FCAA84C7}" srcOrd="0" destOrd="0" presId="urn:microsoft.com/office/officeart/2005/8/layout/radial6"/>
-    <dgm:cxn modelId="{12D644E1-5503-4435-8939-E72C51A17B47}" srcId="{CD8A3CA9-5CED-4745-BCA3-5A1833F591B2}" destId="{41C454EF-55A2-4338-8CC2-E287D99E4001}" srcOrd="0" destOrd="0" parTransId="{F5CCBDC0-0696-4383-B8D0-15718AB2EBCA}" sibTransId="{1A2F81F5-FA29-47A8-AAED-C2CA7ACB529F}"/>
     <dgm:cxn modelId="{663DCBEC-A005-4D17-939A-2C5A1F50DA06}" type="presOf" srcId="{47BE1A68-4D31-4218-B4C9-710716C52730}" destId="{BC224293-7198-4684-ABCD-06CE890D5ABA}" srcOrd="0" destOrd="0" presId="urn:microsoft.com/office/officeart/2005/8/layout/radial6"/>
     <dgm:cxn modelId="{55644C78-2D90-4E76-8372-B22157DA4855}" srcId="{CD8A3CA9-5CED-4745-BCA3-5A1833F591B2}" destId="{0633DC02-4E3D-4445-8D7A-37AA5E815FDA}" srcOrd="4" destOrd="0" parTransId="{1E1E0516-BD7C-42FB-9181-10679BD1FC12}" sibTransId="{47BE1A68-4D31-4218-B4C9-710716C52730}"/>
+    <dgm:cxn modelId="{CBD9DA6D-B88F-4DD7-A8E3-B10A9BE1F771}" type="presOf" srcId="{41C454EF-55A2-4338-8CC2-E287D99E4001}" destId="{C842AD80-31E6-4C2F-A1BC-DC79527F283F}" srcOrd="0" destOrd="0" presId="urn:microsoft.com/office/officeart/2005/8/layout/radial6"/>
     <dgm:cxn modelId="{4CE5DED6-4D44-4255-9C9D-606BE5EEE841}" srcId="{CD8A3CA9-5CED-4745-BCA3-5A1833F591B2}" destId="{16E5719D-5D8F-4704-8E21-62A44ADBBF8C}" srcOrd="1" destOrd="0" parTransId="{D48C381D-F75D-4C50-B289-727991AB658B}" sibTransId="{17D2A4CC-7C76-456C-8056-6F0749700241}"/>
-    <dgm:cxn modelId="{CBD9DA6D-B88F-4DD7-A8E3-B10A9BE1F771}" type="presOf" srcId="{41C454EF-55A2-4338-8CC2-E287D99E4001}" destId="{C842AD80-31E6-4C2F-A1BC-DC79527F283F}" srcOrd="0" destOrd="0" presId="urn:microsoft.com/office/officeart/2005/8/layout/radial6"/>
     <dgm:cxn modelId="{B382D452-63A2-49F1-ADC9-1B9752677825}" type="presOf" srcId="{FA3F4066-15F9-4F6C-9779-E90DF796C944}" destId="{93CD3BE8-8AFA-4B5F-84A4-7F96869B63BB}" srcOrd="0" destOrd="0" presId="urn:microsoft.com/office/officeart/2005/8/layout/radial6"/>
     <dgm:cxn modelId="{44D69517-BBA3-4676-9FE5-474DAEC503B7}" type="presOf" srcId="{16E5719D-5D8F-4704-8E21-62A44ADBBF8C}" destId="{0DFD0002-DAF2-4F4B-B7BB-A0EFF40EE5B3}" srcOrd="0" destOrd="0" presId="urn:microsoft.com/office/officeart/2005/8/layout/radial6"/>
     <dgm:cxn modelId="{633DCBB3-7996-4F82-9877-FE4B2485A198}" type="presOf" srcId="{B5DB10E3-DC77-4F9E-AC9B-25D9199720F2}" destId="{37EB6DA0-DAE6-4ECC-AEB7-B1BC74DBD0FA}" srcOrd="0" destOrd="0" presId="urn:microsoft.com/office/officeart/2005/8/layout/radial6"/>
@@ -3576,7 +3630,7 @@
           <a:p>
             <a:fld id="{4D95DC9A-8233-4961-B242-984AF93CEA29}" type="datetimeFigureOut">
               <a:rPr lang="bg-BG" smtClean="0"/>
-              <a:t>8.5.2026 г.</a:t>
+              <a:t>19.5.2026 г.</a:t>
             </a:fld>
             <a:endParaRPr lang="bg-BG"/>
           </a:p>
@@ -4176,7 +4230,15 @@
           <a:p>
             <a:r>
               <a:rPr lang="ru-RU" dirty="0" smtClean="0"/>
-              <a:t>QR кодовете са двумерни матрични кодове, дефинирани от стандарт ISO/IEC 18004. Те поддържат различни режими на кодиране и нива на корекция на грешки (Reed–Solomon), което позволява възстановяване на информацията дори при частично увреждане.</a:t>
+              <a:t>QR кодовете са двумерни матрични кодове, дефинирани от стандарт ISO/IEC 18004. Те поддържат различни режими на кодиране и нива на корекция на </a:t>
+            </a:r>
+            <a:r>
+              <a:rPr lang="ru-RU" dirty="0" smtClean="0"/>
+              <a:t>грешки, </a:t>
+            </a:r>
+            <a:r>
+              <a:rPr lang="ru-RU" dirty="0" smtClean="0"/>
+              <a:t>което позволява възстановяване на информацията дори при частично увреждане.</a:t>
             </a:r>
             <a:endParaRPr lang="bg-BG" dirty="0"/>
           </a:p>
@@ -4359,7 +4421,19 @@
           <a:p>
             <a:r>
               <a:rPr lang="bg-BG" dirty="0" smtClean="0"/>
-              <a:t>Основни технологии: </a:t>
+              <a:t>Основни </a:t>
+            </a:r>
+            <a:r>
+              <a:rPr lang="bg-BG" dirty="0" smtClean="0"/>
+              <a:t>технологии</a:t>
+            </a:r>
+            <a:r>
+              <a:rPr lang="bg-BG" baseline="0" dirty="0" smtClean="0"/>
+              <a:t> са</a:t>
+            </a:r>
+            <a:r>
+              <a:rPr lang="bg-BG" dirty="0" smtClean="0"/>
+              <a:t> </a:t>
             </a:r>
             <a:r>
               <a:rPr lang="en-US" dirty="0" smtClean="0"/>
@@ -4371,11 +4445,11 @@
             </a:r>
             <a:r>
               <a:rPr lang="en-US" dirty="0" smtClean="0"/>
-              <a:t>Django (</a:t>
+              <a:t>Django</a:t>
             </a:r>
             <a:r>
               <a:rPr lang="bg-BG" dirty="0" smtClean="0"/>
-              <a:t>уеб рамка), </a:t>
+              <a:t>, </a:t>
             </a:r>
             <a:r>
               <a:rPr lang="en-US" dirty="0" err="1" smtClean="0"/>
@@ -4391,11 +4465,23 @@
             </a:r>
             <a:r>
               <a:rPr lang="en-US" dirty="0" smtClean="0"/>
-              <a:t>Pillow (</a:t>
+              <a:t>Pillow </a:t>
             </a:r>
             <a:r>
               <a:rPr lang="bg-BG" dirty="0" smtClean="0"/>
-              <a:t>генериране на </a:t>
+              <a:t>за</a:t>
+            </a:r>
+            <a:r>
+              <a:rPr lang="bg-BG" baseline="0" dirty="0" smtClean="0"/>
+              <a:t> </a:t>
+            </a:r>
+            <a:r>
+              <a:rPr lang="bg-BG" dirty="0" smtClean="0"/>
+              <a:t>генериране </a:t>
+            </a:r>
+            <a:r>
+              <a:rPr lang="bg-BG" dirty="0" smtClean="0"/>
+              <a:t>на </a:t>
             </a:r>
             <a:r>
               <a:rPr lang="en-US" dirty="0" smtClean="0"/>
@@ -4403,7 +4489,7 @@
             </a:r>
             <a:r>
               <a:rPr lang="bg-BG" dirty="0" smtClean="0"/>
-              <a:t>изображения), </a:t>
+              <a:t>изображения, </a:t>
             </a:r>
             <a:r>
               <a:rPr lang="en-US" dirty="0" err="1" smtClean="0"/>
@@ -4411,11 +4497,23 @@
             </a:r>
             <a:r>
               <a:rPr lang="en-US" dirty="0" smtClean="0"/>
-              <a:t> (</a:t>
+              <a:t> </a:t>
             </a:r>
             <a:r>
               <a:rPr lang="bg-BG" dirty="0" smtClean="0"/>
-              <a:t>декодиране на </a:t>
+              <a:t>за</a:t>
+            </a:r>
+            <a:r>
+              <a:rPr lang="bg-BG" baseline="0" dirty="0" smtClean="0"/>
+              <a:t> </a:t>
+            </a:r>
+            <a:r>
+              <a:rPr lang="bg-BG" dirty="0" smtClean="0"/>
+              <a:t>декодиране </a:t>
+            </a:r>
+            <a:r>
+              <a:rPr lang="bg-BG" dirty="0" smtClean="0"/>
+              <a:t>на </a:t>
             </a:r>
             <a:r>
               <a:rPr lang="en-US" dirty="0" smtClean="0"/>
@@ -4423,7 +4521,7 @@
             </a:r>
             <a:r>
               <a:rPr lang="bg-BG" dirty="0" smtClean="0"/>
-              <a:t>кодове), </a:t>
+              <a:t>кодове, </a:t>
             </a:r>
             <a:r>
               <a:rPr lang="en-US" dirty="0" smtClean="0"/>
@@ -4431,7 +4529,11 @@
             </a:r>
             <a:r>
               <a:rPr lang="bg-BG" dirty="0" smtClean="0"/>
-              <a:t>база данни и </a:t>
+              <a:t>за база </a:t>
+            </a:r>
+            <a:r>
+              <a:rPr lang="bg-BG" dirty="0" smtClean="0"/>
+              <a:t>данни и </a:t>
             </a:r>
             <a:r>
               <a:rPr lang="en-US" dirty="0" smtClean="0"/>
@@ -4534,7 +4636,23 @@
           <a:p>
             <a:r>
               <a:rPr lang="ru-RU" dirty="0" smtClean="0"/>
-              <a:t>Потребителят въвежда текст или URL, системата валидира входните данни и генерира QR код с подходящо ниво на корекция на грешки. </a:t>
+              <a:t>В модула за генериране на </a:t>
+            </a:r>
+            <a:r>
+              <a:rPr lang="en-US" dirty="0" smtClean="0"/>
+              <a:t>QR </a:t>
+            </a:r>
+            <a:r>
+              <a:rPr lang="bg-BG" dirty="0" smtClean="0"/>
+              <a:t>код </a:t>
+            </a:r>
+            <a:r>
+              <a:rPr lang="ru-RU" dirty="0" smtClean="0"/>
+              <a:t>потребителят </a:t>
+            </a:r>
+            <a:r>
+              <a:rPr lang="ru-RU" dirty="0" smtClean="0"/>
+              <a:t>въвежда текст или URL, системата валидира входните данни и генерира QR код с подходящо ниво на корекция на грешки. </a:t>
             </a:r>
             <a:endParaRPr lang="en-US" dirty="0" smtClean="0"/>
           </a:p>
@@ -4629,7 +4747,19 @@
           <a:p>
             <a:r>
               <a:rPr lang="ru-RU" dirty="0" smtClean="0"/>
-              <a:t>Потребителят качва изображение с QR код. Системата използва OpenCV за автоматично разпознаване и декодиране. </a:t>
+              <a:t>В</a:t>
+            </a:r>
+            <a:r>
+              <a:rPr lang="ru-RU" baseline="0" dirty="0" smtClean="0"/>
+              <a:t> модула за сканиране и верификация п</a:t>
+            </a:r>
+            <a:r>
+              <a:rPr lang="ru-RU" dirty="0" smtClean="0"/>
+              <a:t>отребителят </a:t>
+            </a:r>
+            <a:r>
+              <a:rPr lang="ru-RU" dirty="0" smtClean="0"/>
+              <a:t>качва изображение с QR код. Системата използва OpenCV за автоматично разпознаване и декодиране. </a:t>
             </a:r>
             <a:endParaRPr lang="en-US" dirty="0" smtClean="0"/>
           </a:p>
@@ -4819,7 +4949,11 @@
           <a:p>
             <a:r>
               <a:rPr lang="ru-RU" dirty="0" smtClean="0"/>
-              <a:t>Системата използва сървърна валидация, защита срещу често срещани уеб атаки и минимализация на данните в QR кода (само идентификатор). </a:t>
+              <a:t>Системата използва сървърна валидация, защита срещу често срещани уеб атаки и минимализация на данните в QR </a:t>
+            </a:r>
+            <a:r>
+              <a:rPr lang="ru-RU" dirty="0" smtClean="0"/>
+              <a:t>кода. </a:t>
             </a:r>
             <a:endParaRPr lang="en-US" dirty="0" smtClean="0"/>
           </a:p>
@@ -7008,13 +7142,13 @@
   <p:clrMapOvr>
     <a:masterClrMapping/>
   </p:clrMapOvr>
-  <mc:AlternateContent xmlns:mc="http://schemas.openxmlformats.org/markup-compatibility/2006">
-    <mc:Choice xmlns:p14="http://schemas.microsoft.com/office/powerpoint/2010/main" Requires="p14">
+  <mc:AlternateContent xmlns:mc="http://schemas.openxmlformats.org/markup-compatibility/2006" xmlns:p14="http://schemas.microsoft.com/office/powerpoint/2010/main">
+    <mc:Choice Requires="p14">
       <p:transition spd="slow" p14:dur="1200">
         <p14:prism/>
       </p:transition>
     </mc:Choice>
-    <mc:Fallback>
+    <mc:Fallback xmlns="">
       <p:transition spd="slow">
         <p:fade/>
       </p:transition>
@@ -7144,13 +7278,13 @@
   <p:clrMapOvr>
     <a:masterClrMapping/>
   </p:clrMapOvr>
-  <mc:AlternateContent xmlns:mc="http://schemas.openxmlformats.org/markup-compatibility/2006">
-    <mc:Choice xmlns:p14="http://schemas.microsoft.com/office/powerpoint/2010/main" Requires="p14">
+  <mc:AlternateContent xmlns:mc="http://schemas.openxmlformats.org/markup-compatibility/2006" xmlns:p14="http://schemas.microsoft.com/office/powerpoint/2010/main">
+    <mc:Choice Requires="p14">
       <p:transition spd="slow" p14:dur="1200">
         <p14:prism/>
       </p:transition>
     </mc:Choice>
-    <mc:Fallback>
+    <mc:Fallback xmlns="">
       <p:transition spd="slow">
         <p:fade/>
       </p:transition>
@@ -7404,13 +7538,13 @@
   <p:clrMapOvr>
     <a:masterClrMapping/>
   </p:clrMapOvr>
-  <mc:AlternateContent xmlns:mc="http://schemas.openxmlformats.org/markup-compatibility/2006">
-    <mc:Choice xmlns:p14="http://schemas.microsoft.com/office/powerpoint/2010/main" Requires="p14">
+  <mc:AlternateContent xmlns:mc="http://schemas.openxmlformats.org/markup-compatibility/2006" xmlns:p14="http://schemas.microsoft.com/office/powerpoint/2010/main">
+    <mc:Choice Requires="p14">
       <p:transition spd="slow" p14:dur="1200">
         <p14:prism/>
       </p:transition>
     </mc:Choice>
-    <mc:Fallback>
+    <mc:Fallback xmlns="">
       <p:transition spd="slow">
         <p:fade/>
       </p:transition>
@@ -7492,13 +7626,13 @@
   <p:clrMapOvr>
     <a:masterClrMapping/>
   </p:clrMapOvr>
-  <mc:AlternateContent xmlns:mc="http://schemas.openxmlformats.org/markup-compatibility/2006">
-    <mc:Choice xmlns:p14="http://schemas.microsoft.com/office/powerpoint/2010/main" Requires="p14">
+  <mc:AlternateContent xmlns:mc="http://schemas.openxmlformats.org/markup-compatibility/2006" xmlns:p14="http://schemas.microsoft.com/office/powerpoint/2010/main">
+    <mc:Choice Requires="p14">
       <p:transition spd="slow" p14:dur="1200">
         <p14:prism/>
       </p:transition>
     </mc:Choice>
-    <mc:Fallback>
+    <mc:Fallback xmlns="">
       <p:transition spd="slow">
         <p:fade/>
       </p:transition>
@@ -7624,13 +7758,13 @@
   <p:clrMapOvr>
     <a:masterClrMapping/>
   </p:clrMapOvr>
-  <mc:AlternateContent xmlns:mc="http://schemas.openxmlformats.org/markup-compatibility/2006">
-    <mc:Choice xmlns:p14="http://schemas.microsoft.com/office/powerpoint/2010/main" Requires="p14">
+  <mc:AlternateContent xmlns:mc="http://schemas.openxmlformats.org/markup-compatibility/2006" xmlns:p14="http://schemas.microsoft.com/office/powerpoint/2010/main">
+    <mc:Choice Requires="p14">
       <p:transition spd="slow" p14:dur="1200">
         <p14:prism/>
       </p:transition>
     </mc:Choice>
-    <mc:Fallback>
+    <mc:Fallback xmlns="">
       <p:transition spd="slow">
         <p:fade/>
       </p:transition>
@@ -7801,13 +7935,13 @@
   <p:clrMapOvr>
     <a:masterClrMapping/>
   </p:clrMapOvr>
-  <mc:AlternateContent xmlns:mc="http://schemas.openxmlformats.org/markup-compatibility/2006">
-    <mc:Choice xmlns:p14="http://schemas.microsoft.com/office/powerpoint/2010/main" Requires="p14">
+  <mc:AlternateContent xmlns:mc="http://schemas.openxmlformats.org/markup-compatibility/2006" xmlns:p14="http://schemas.microsoft.com/office/powerpoint/2010/main">
+    <mc:Choice Requires="p14">
       <p:transition spd="slow" p14:dur="1200">
         <p14:prism/>
       </p:transition>
     </mc:Choice>
-    <mc:Fallback>
+    <mc:Fallback xmlns="">
       <p:transition spd="slow">
         <p:fade/>
       </p:transition>
@@ -8022,13 +8156,13 @@
   <p:clrMapOvr>
     <a:masterClrMapping/>
   </p:clrMapOvr>
-  <mc:AlternateContent xmlns:mc="http://schemas.openxmlformats.org/markup-compatibility/2006">
-    <mc:Choice xmlns:p14="http://schemas.microsoft.com/office/powerpoint/2010/main" Requires="p14">
+  <mc:AlternateContent xmlns:mc="http://schemas.openxmlformats.org/markup-compatibility/2006" xmlns:p14="http://schemas.microsoft.com/office/powerpoint/2010/main">
+    <mc:Choice Requires="p14">
       <p:transition spd="slow" p14:dur="1200">
         <p14:prism/>
       </p:transition>
     </mc:Choice>
-    <mc:Fallback>
+    <mc:Fallback xmlns="">
       <p:transition spd="slow">
         <p:fade/>
       </p:transition>
@@ -8187,13 +8321,13 @@
   <p:clrMapOvr>
     <a:masterClrMapping/>
   </p:clrMapOvr>
-  <mc:AlternateContent xmlns:mc="http://schemas.openxmlformats.org/markup-compatibility/2006">
-    <mc:Choice xmlns:p14="http://schemas.microsoft.com/office/powerpoint/2010/main" Requires="p14">
+  <mc:AlternateContent xmlns:mc="http://schemas.openxmlformats.org/markup-compatibility/2006" xmlns:p14="http://schemas.microsoft.com/office/powerpoint/2010/main">
+    <mc:Choice Requires="p14">
       <p:transition spd="slow" p14:dur="1200">
         <p14:prism/>
       </p:transition>
     </mc:Choice>
-    <mc:Fallback>
+    <mc:Fallback xmlns="">
       <p:transition spd="slow">
         <p:fade/>
       </p:transition>
@@ -8553,13 +8687,13 @@
   <p:clrMapOvr>
     <a:masterClrMapping/>
   </p:clrMapOvr>
-  <mc:AlternateContent xmlns:mc="http://schemas.openxmlformats.org/markup-compatibility/2006">
-    <mc:Choice xmlns:p14="http://schemas.microsoft.com/office/powerpoint/2010/main" Requires="p14">
+  <mc:AlternateContent xmlns:mc="http://schemas.openxmlformats.org/markup-compatibility/2006" xmlns:p14="http://schemas.microsoft.com/office/powerpoint/2010/main">
+    <mc:Choice Requires="p14">
       <p:transition spd="slow" p14:dur="1200">
         <p14:prism/>
       </p:transition>
     </mc:Choice>
-    <mc:Fallback>
+    <mc:Fallback xmlns="">
       <p:transition spd="slow">
         <p:fade/>
       </p:transition>
@@ -8794,7 +8928,7 @@
         </p:blipFill>
         <p:spPr>
           <a:xfrm>
-            <a:off x="0" y="652886"/>
+            <a:off x="-180" y="732124"/>
             <a:ext cx="9144000" cy="4490614"/>
           </a:xfrm>
           <a:prstGeom prst="rect">
@@ -8807,13 +8941,13 @@
   <p:clrMapOvr>
     <a:masterClrMapping/>
   </p:clrMapOvr>
-  <mc:AlternateContent xmlns:mc="http://schemas.openxmlformats.org/markup-compatibility/2006">
-    <mc:Choice xmlns:p14="http://schemas.microsoft.com/office/powerpoint/2010/main" Requires="p14">
+  <mc:AlternateContent xmlns:mc="http://schemas.openxmlformats.org/markup-compatibility/2006" xmlns:p14="http://schemas.microsoft.com/office/powerpoint/2010/main">
+    <mc:Choice Requires="p14">
       <p:transition spd="slow" p14:dur="1200">
         <p14:prism/>
       </p:transition>
     </mc:Choice>
-    <mc:Fallback>
+    <mc:Fallback xmlns="">
       <p:transition spd="slow">
         <p:fade/>
       </p:transition>
@@ -8946,13 +9080,13 @@
   <p:clrMapOvr>
     <a:masterClrMapping/>
   </p:clrMapOvr>
-  <mc:AlternateContent xmlns:mc="http://schemas.openxmlformats.org/markup-compatibility/2006">
-    <mc:Choice xmlns:p14="http://schemas.microsoft.com/office/powerpoint/2010/main" Requires="p14">
+  <mc:AlternateContent xmlns:mc="http://schemas.openxmlformats.org/markup-compatibility/2006" xmlns:p14="http://schemas.microsoft.com/office/powerpoint/2010/main">
+    <mc:Choice Requires="p14">
       <p:transition spd="slow" p14:dur="1200">
         <p14:prism/>
       </p:transition>
     </mc:Choice>
-    <mc:Fallback>
+    <mc:Fallback xmlns="">
       <p:transition spd="slow">
         <p:fade/>
       </p:transition>
@@ -9061,13 +9195,13 @@
   <p:clrMapOvr>
     <a:masterClrMapping/>
   </p:clrMapOvr>
-  <mc:AlternateContent xmlns:mc="http://schemas.openxmlformats.org/markup-compatibility/2006">
-    <mc:Choice xmlns:p14="http://schemas.microsoft.com/office/powerpoint/2010/main" Requires="p14">
+  <mc:AlternateContent xmlns:mc="http://schemas.openxmlformats.org/markup-compatibility/2006" xmlns:p14="http://schemas.microsoft.com/office/powerpoint/2010/main">
+    <mc:Choice Requires="p14">
       <p:transition spd="slow" p14:dur="1200">
         <p14:prism/>
       </p:transition>
     </mc:Choice>
-    <mc:Fallback>
+    <mc:Fallback xmlns="">
       <p:transition spd="slow">
         <p:fade/>
       </p:transition>

--- a/DR/Защита_Тема_11.pptx
+++ b/DR/Защита_Тема_11.pptx
@@ -4230,15 +4230,7 @@
           <a:p>
             <a:r>
               <a:rPr lang="ru-RU" dirty="0" smtClean="0"/>
-              <a:t>QR кодовете са двумерни матрични кодове, дефинирани от стандарт ISO/IEC 18004. Те поддържат различни режими на кодиране и нива на корекция на </a:t>
-            </a:r>
-            <a:r>
-              <a:rPr lang="ru-RU" dirty="0" smtClean="0"/>
-              <a:t>грешки, </a:t>
-            </a:r>
-            <a:r>
-              <a:rPr lang="ru-RU" dirty="0" smtClean="0"/>
-              <a:t>което позволява възстановяване на информацията дори при частично увреждане.</a:t>
+              <a:t>QR кодовете са двумерни матрични кодове, дефинирани от стандарт ISO/IEC 18004. Те поддържат различни режими на кодиране и нива на корекция на грешки, което позволява възстановяване на информацията дори при частично увреждане.</a:t>
             </a:r>
             <a:endParaRPr lang="bg-BG" dirty="0"/>
           </a:p>
@@ -4421,11 +4413,7 @@
           <a:p>
             <a:r>
               <a:rPr lang="bg-BG" dirty="0" smtClean="0"/>
-              <a:t>Основни </a:t>
-            </a:r>
-            <a:r>
-              <a:rPr lang="bg-BG" dirty="0" smtClean="0"/>
-              <a:t>технологии</a:t>
+              <a:t>Основни технологии</a:t>
             </a:r>
             <a:r>
               <a:rPr lang="bg-BG" baseline="0" dirty="0" smtClean="0"/>
@@ -4477,11 +4465,7 @@
             </a:r>
             <a:r>
               <a:rPr lang="bg-BG" dirty="0" smtClean="0"/>
-              <a:t>генериране </a:t>
-            </a:r>
-            <a:r>
-              <a:rPr lang="bg-BG" dirty="0" smtClean="0"/>
-              <a:t>на </a:t>
+              <a:t>генериране на </a:t>
             </a:r>
             <a:r>
               <a:rPr lang="en-US" dirty="0" smtClean="0"/>
@@ -4509,11 +4493,7 @@
             </a:r>
             <a:r>
               <a:rPr lang="bg-BG" dirty="0" smtClean="0"/>
-              <a:t>декодиране </a:t>
-            </a:r>
-            <a:r>
-              <a:rPr lang="bg-BG" dirty="0" smtClean="0"/>
-              <a:t>на </a:t>
+              <a:t>декодиране на </a:t>
             </a:r>
             <a:r>
               <a:rPr lang="en-US" dirty="0" smtClean="0"/>
@@ -4529,11 +4509,7 @@
             </a:r>
             <a:r>
               <a:rPr lang="bg-BG" dirty="0" smtClean="0"/>
-              <a:t>за база </a:t>
-            </a:r>
-            <a:r>
-              <a:rPr lang="bg-BG" dirty="0" smtClean="0"/>
-              <a:t>данни и </a:t>
+              <a:t>за база данни и </a:t>
             </a:r>
             <a:r>
               <a:rPr lang="en-US" dirty="0" smtClean="0"/>
@@ -4648,11 +4624,7 @@
             </a:r>
             <a:r>
               <a:rPr lang="ru-RU" dirty="0" smtClean="0"/>
-              <a:t>потребителят </a:t>
-            </a:r>
-            <a:r>
-              <a:rPr lang="ru-RU" dirty="0" smtClean="0"/>
-              <a:t>въвежда текст или URL, системата валидира входните данни и генерира QR код с подходящо ниво на корекция на грешки. </a:t>
+              <a:t>потребителят въвежда текст или URL, системата валидира входните данни и генерира QR код с подходящо ниво на корекция на грешки. </a:t>
             </a:r>
             <a:endParaRPr lang="en-US" dirty="0" smtClean="0"/>
           </a:p>
@@ -4755,11 +4727,7 @@
             </a:r>
             <a:r>
               <a:rPr lang="ru-RU" dirty="0" smtClean="0"/>
-              <a:t>отребителят </a:t>
-            </a:r>
-            <a:r>
-              <a:rPr lang="ru-RU" dirty="0" smtClean="0"/>
-              <a:t>качва изображение с QR код. Системата използва OpenCV за автоматично разпознаване и декодиране. </a:t>
+              <a:t>отребителят качва изображение с QR код. Системата използва OpenCV за автоматично разпознаване и декодиране. </a:t>
             </a:r>
             <a:endParaRPr lang="en-US" dirty="0" smtClean="0"/>
           </a:p>
@@ -4949,11 +4917,7 @@
           <a:p>
             <a:r>
               <a:rPr lang="ru-RU" dirty="0" smtClean="0"/>
-              <a:t>Системата използва сървърна валидация, защита срещу често срещани уеб атаки и минимализация на данните в QR </a:t>
-            </a:r>
-            <a:r>
-              <a:rPr lang="ru-RU" dirty="0" smtClean="0"/>
-              <a:t>кода. </a:t>
+              <a:t>Системата използва сървърна валидация, защита срещу често срещани уеб атаки и минимализация на данните в QR кода. </a:t>
             </a:r>
             <a:endParaRPr lang="en-US" dirty="0" smtClean="0"/>
           </a:p>
@@ -8915,7 +8879,7 @@
           <p:nvPr/>
         </p:nvPicPr>
         <p:blipFill>
-          <a:blip r:embed="rId3">
+          <a:blip r:embed="rId3" cstate="print">
             <a:extLst>
               <a:ext uri="{28A0092B-C50C-407E-A947-70E740481C1C}">
                 <a14:useLocalDpi xmlns:a14="http://schemas.microsoft.com/office/drawing/2010/main" val="0"/>
@@ -8928,12 +8892,65 @@
         </p:blipFill>
         <p:spPr>
           <a:xfrm>
-            <a:off x="-180" y="732124"/>
-            <a:ext cx="9144000" cy="4490614"/>
+            <a:off x="-360" y="1006466"/>
+            <a:ext cx="4821364" cy="2367770"/>
           </a:xfrm>
           <a:prstGeom prst="rect">
             <a:avLst/>
           </a:prstGeom>
+          <a:ln>
+            <a:noFill/>
+          </a:ln>
+          <a:effectLst>
+            <a:outerShdw blurRad="292100" dist="139700" dir="2700000" algn="tl" rotWithShape="0">
+              <a:srgbClr val="333333">
+                <a:alpha val="65000"/>
+              </a:srgbClr>
+            </a:outerShdw>
+          </a:effectLst>
+        </p:spPr>
+      </p:pic>
+      <p:pic>
+        <p:nvPicPr>
+          <p:cNvPr id="4" name="Picture 3"/>
+          <p:cNvPicPr>
+            <a:picLocks noChangeAspect="1"/>
+          </p:cNvPicPr>
+          <p:nvPr/>
+        </p:nvPicPr>
+        <p:blipFill>
+          <a:blip r:embed="rId4">
+            <a:extLst>
+              <a:ext uri="{28A0092B-C50C-407E-A947-70E740481C1C}">
+                <a14:useLocalDpi xmlns:a14="http://schemas.microsoft.com/office/drawing/2010/main" val="0"/>
+              </a:ext>
+            </a:extLst>
+          </a:blip>
+          <a:stretch>
+            <a:fillRect/>
+          </a:stretch>
+        </p:blipFill>
+        <p:spPr>
+          <a:xfrm>
+            <a:off x="4821004" y="2016550"/>
+            <a:ext cx="4322996" cy="3126950"/>
+          </a:xfrm>
+          <a:prstGeom prst="roundRect">
+            <a:avLst>
+              <a:gd name="adj" fmla="val 8594"/>
+            </a:avLst>
+          </a:prstGeom>
+          <a:solidFill>
+            <a:srgbClr val="FFFFFF">
+              <a:shade val="85000"/>
+            </a:srgbClr>
+          </a:solidFill>
+          <a:ln>
+            <a:noFill/>
+          </a:ln>
+          <a:effectLst>
+            <a:reflection blurRad="12700" stA="38000" endPos="28000" dist="5000" dir="5400000" sy="-100000" algn="bl" rotWithShape="0"/>
+          </a:effectLst>
         </p:spPr>
       </p:pic>
     </p:spTree>
@@ -9063,8 +9080,8 @@
         </p:blipFill>
         <p:spPr>
           <a:xfrm>
-            <a:off x="0" y="723761"/>
-            <a:ext cx="4484071" cy="2219674"/>
+            <a:off x="816164" y="937343"/>
+            <a:ext cx="7140298" cy="3534541"/>
           </a:xfrm>
           <a:prstGeom prst="rect">
             <a:avLst/>
